--- a/docs/NutriBrick-pitch.pptx
+++ b/docs/NutriBrick-pitch.pptx
@@ -14,9 +14,10 @@
     <p:sldId id="262" r:id="rId8"/>
     <p:sldId id="263" r:id="rId9"/>
     <p:sldId id="264" r:id="rId10"/>
+    <p:sldId id="265" r:id="rId11"/>
   </p:sldIdLst>
   <p:notesMasterIdLst>
-    <p:notesMasterId r:id="rId11"/>
+    <p:notesMasterId r:id="rId12"/>
   </p:notesMasterIdLst>
   <p:sldSz cx="12192000" cy="6858000"/>
   <p:notesSz cx="6858000" cy="12192000"/>
@@ -510,7 +511,7 @@
           <a:p>
             <a:r>
               <a:rPr lang="en-US" dirty="0"/>
-              <a:t>Hero. "Most Australian kids aren't eating enough of what they need."</a:t>
+              <a:t>NutriBrick is a snack for primary school kids, shaped like a building brick that actually stacks. Then the AIHW numbers.</a:t>
             </a:r>
             <a:endParaRPr lang="en-US" dirty="0"/>
           </a:p>
@@ -534,6 +535,94 @@
             <a:fld id="{F7021451-1387-4CA6-816F-3879F97B5CBC}" type="slidenum">
               <a:rPr lang="en-US"/>
               <a:t>1</a:t>
+            </a:fld>
+            <a:endParaRPr lang="en-US"/>
+          </a:p>
+        </p:txBody>
+      </p:sp>
+    </p:spTree>
+    <p:extLst>
+      <p:ext uri="{BB962C8B-B14F-4D97-AF65-F5344CB8AC3E}">
+        <p14:creationId xmlns:p14="http://schemas.microsoft.com/office/powerpoint/2010/main" val="1024086991"/>
+      </p:ext>
+    </p:extLst>
+  </p:cSld>
+  <p:clrMapOvr>
+    <a:masterClrMapping/>
+  </p:clrMapOvr>
+</p:notes>
+</file>
+
+<file path=ppt/notesSlides/notesSlide10.xml><?xml version="1.0" encoding="utf-8"?>
+<p:notes xmlns:a="http://schemas.openxmlformats.org/drawingml/2006/main" xmlns:r="http://schemas.openxmlformats.org/officeDocument/2006/relationships" xmlns:p="http://schemas.openxmlformats.org/presentationml/2006/main">
+  <p:cSld>
+    <p:spTree>
+      <p:nvGrpSpPr>
+        <p:cNvPr id="1" name=""/>
+        <p:cNvGrpSpPr/>
+        <p:nvPr/>
+      </p:nvGrpSpPr>
+      <p:grpSpPr>
+        <a:xfrm>
+          <a:off x="0" y="0"/>
+          <a:ext cx="0" cy="0"/>
+          <a:chOff x="0" y="0"/>
+          <a:chExt cx="0" cy="0"/>
+        </a:xfrm>
+      </p:grpSpPr>
+      <p:sp>
+        <p:nvSpPr>
+          <p:cNvPr id="2" name="Slide Image Placeholder 1"/>
+          <p:cNvSpPr>
+            <a:spLocks noGrp="1" noRot="1" noChangeAspect="1"/>
+          </p:cNvSpPr>
+          <p:nvPr>
+            <p:ph type="sldImg"/>
+          </p:nvPr>
+        </p:nvSpPr>
+        <p:spPr/>
+      </p:sp>
+      <p:sp>
+        <p:nvSpPr>
+          <p:cNvPr id="3" name="Notes Placeholder 2"/>
+          <p:cNvSpPr>
+            <a:spLocks noGrp="1"/>
+          </p:cNvSpPr>
+          <p:nvPr>
+            <p:ph type="body" idx="1"/>
+          </p:nvPr>
+        </p:nvSpPr>
+        <p:spPr/>
+        <p:txBody>
+          <a:bodyPr/>
+          <a:lstStyle/>
+          <a:p>
+            <a:r>
+              <a:rPr lang="en-US" dirty="0"/>
+              <a:t>Year 10 team through Future Anything. Close on the reasoning: kids decide with their eyes and hands first, and almost every healthy snack ignores that.</a:t>
+            </a:r>
+            <a:endParaRPr lang="en-US" dirty="0"/>
+          </a:p>
+        </p:txBody>
+      </p:sp>
+      <p:sp>
+        <p:nvSpPr>
+          <p:cNvPr id="4" name="Slide Number Placeholder 3"/>
+          <p:cNvSpPr>
+            <a:spLocks noGrp="1"/>
+          </p:cNvSpPr>
+          <p:nvPr>
+            <p:ph type="sldNum" sz="quarter" idx="10"/>
+          </p:nvPr>
+        </p:nvSpPr>
+        <p:spPr/>
+        <p:txBody>
+          <a:bodyPr/>
+          <a:lstStyle/>
+          <a:p>
+            <a:fld id="{F7021451-1387-4CA6-816F-3879F97B5CBC}" type="slidenum">
+              <a:rPr lang="en-US"/>
+              <a:t>10</a:t>
             </a:fld>
             <a:endParaRPr lang="en-US"/>
           </a:p>
@@ -598,7 +687,7 @@
           <a:p>
             <a:r>
               <a:rPr lang="en-US" dirty="0"/>
-              <a:t>Our research found over a million children in Australia are unhealthy, and ninety-five percent aren't meeting their daily macronutrient targets. But the real problem isn't information.</a:t>
+              <a:t>According to the Australian Institute of Health and Welfare, over a million children in Australia are unhealthy and 95% are not hitting their macronutrient requirements daily. Have the source ready.</a:t>
             </a:r>
             <a:endParaRPr lang="en-US" dirty="0"/>
           </a:p>
@@ -686,7 +775,7 @@
           <a:p>
             <a:r>
               <a:rPr lang="en-US" dirty="0"/>
-              <a:t>BEAT — pause after "Nagging is not a nutrition plan."</a:t>
+              <a:t>Parents already know what is healthy. The hard part is getting a kid to eat it. Young kids decide by how it looks and feels, which is why explaining does not work.</a:t>
             </a:r>
             <a:endParaRPr lang="en-US" dirty="0"/>
           </a:p>
@@ -774,7 +863,7 @@
           <a:p>
             <a:r>
               <a:rPr lang="en-US" dirty="0"/>
-              <a:t>So we made this. Let the tower render before you speak. BEAT — "Then they eat the tower."</a:t>
+              <a:t>Let the tower finish loading before you talk. Size of a Duplo brick, studs interlock, every brick identical so the nutrition per brick is fixed.</a:t>
             </a:r>
             <a:endParaRPr lang="en-US" dirty="0"/>
           </a:p>
@@ -862,7 +951,7 @@
           <a:p>
             <a:r>
               <a:rPr lang="en-US" dirty="0"/>
-              <a:t>BEAT — the setup gets them nodding, THEN turn it. Do not rush. "Same instinct, opposite outcome."</a:t>
+              <a:t>Slow down here. State the rule first, then explain why it does not apply: the building is what gets it eaten, so the food is not wasted.</a:t>
             </a:r>
             <a:endParaRPr lang="en-US" dirty="0"/>
           </a:p>
@@ -950,7 +1039,7 @@
           <a:p>
             <a:r>
               <a:rPr lang="en-US" dirty="0"/>
-              <a:t>Nothing else on the shelf does that. If you are over time, this is the slide to cut.</a:t>
+              <a:t>Name them: Kidfresh is frozen, long ingredient lists, not sold in Australia. Little Spoon is fresh but subscription only and priced for higher income parents. Gummy blocks stack but are sugar. Be ready to say what each does well.</a:t>
             </a:r>
             <a:endParaRPr lang="en-US" dirty="0"/>
           </a:p>
@@ -1038,7 +1127,7 @@
           <a:p>
             <a:r>
               <a:rPr lang="en-US" dirty="0"/>
-              <a:t>We are not hiding anything. Seven ingredients. Nut-free, so it clears the school gate.</a:t>
+              <a:t>45 grams, 203 calories, 13g protein, 4g fibre, full day of vitamin C, A and D. Seven ingredients. Nut free because the bind is sunflower seed butter. Say the numbers clearly, do not rush the list.</a:t>
             </a:r>
             <a:endParaRPr lang="en-US" dirty="0"/>
           </a:p>
@@ -1126,7 +1215,7 @@
           <a:p>
             <a:r>
               <a:rPr lang="en-US" dirty="0"/>
-              <a:t>Two dollars a brick, pack of seven, fourteen dollars. And every pack comes with plans for a new build — the repeat-purchase hook.</a:t>
+              <a:t>$2 a brick, packs of seven, $14 a week. In store, not a subscription, which is where Little Spoon prices itself out. Build plans are the repeat purchase hook.</a:t>
             </a:r>
             <a:endParaRPr lang="en-US" dirty="0"/>
           </a:p>
@@ -1214,7 +1303,7 @@
           <a:p>
             <a:r>
               <a:rPr lang="en-US" dirty="0"/>
-              <a:t>BEAT — land it and stop. "Thank you."</a:t>
+              <a:t>Say the $100,000 clearly, then the three things it buys. Do not rush it or apologise for it. This is the part judges are waiting for.</a:t>
             </a:r>
             <a:endParaRPr lang="en-US" dirty="0"/>
           </a:p>
@@ -1991,6 +2080,457 @@
 </p:sld>
 </file>
 
+<file path=ppt/slides/slide10.xml><?xml version="1.0" encoding="utf-8"?>
+<p:sld xmlns:a="http://schemas.openxmlformats.org/drawingml/2006/main" xmlns:r="http://schemas.openxmlformats.org/officeDocument/2006/relationships" xmlns:p="http://schemas.openxmlformats.org/presentationml/2006/main">
+  <p:cSld name="Slide 10">
+    <p:bg>
+      <p:bgPr>
+        <a:solidFill>
+          <a:srgbClr val="402310"/>
+        </a:solidFill>
+      </p:bgPr>
+    </p:bg>
+    <p:spTree>
+      <p:nvGrpSpPr>
+        <p:cNvPr id="1" name=""/>
+        <p:cNvGrpSpPr/>
+        <p:nvPr/>
+      </p:nvGrpSpPr>
+      <p:grpSpPr>
+        <a:xfrm>
+          <a:off x="0" y="0"/>
+          <a:ext cx="0" cy="0"/>
+          <a:chOff x="0" y="0"/>
+          <a:chExt cx="0" cy="0"/>
+        </a:xfrm>
+      </p:grpSpPr>
+      <p:sp>
+        <p:nvSpPr>
+          <p:cNvPr id="2" name="Shape 0"/>
+          <p:cNvSpPr/>
+          <p:nvPr/>
+        </p:nvSpPr>
+        <p:spPr>
+          <a:xfrm>
+            <a:off x="566928" y="502920"/>
+            <a:ext cx="457200" cy="457200"/>
+          </a:xfrm>
+          <a:prstGeom prst="roundRect">
+            <a:avLst>
+              <a:gd name="adj" fmla="val 50000"/>
+            </a:avLst>
+          </a:prstGeom>
+          <a:solidFill>
+            <a:srgbClr val="643312"/>
+          </a:solidFill>
+          <a:ln w="25400">
+            <a:solidFill>
+              <a:srgbClr val="402310"/>
+            </a:solidFill>
+            <a:prstDash val="solid"/>
+          </a:ln>
+        </p:spPr>
+      </p:sp>
+      <p:sp>
+        <p:nvSpPr>
+          <p:cNvPr id="3" name="Shape 1"/>
+          <p:cNvSpPr/>
+          <p:nvPr/>
+        </p:nvSpPr>
+        <p:spPr>
+          <a:xfrm>
+            <a:off x="653796" y="589788"/>
+            <a:ext cx="86868" cy="86868"/>
+          </a:xfrm>
+          <a:prstGeom prst="ellipse">
+            <a:avLst/>
+          </a:prstGeom>
+          <a:solidFill>
+            <a:srgbClr val="F6A06B"/>
+          </a:solidFill>
+          <a:ln w="12700">
+            <a:solidFill>
+              <a:srgbClr val="333333"/>
+            </a:solidFill>
+            <a:prstDash val="solid"/>
+          </a:ln>
+        </p:spPr>
+      </p:sp>
+      <p:sp>
+        <p:nvSpPr>
+          <p:cNvPr id="4" name="Shape 2"/>
+          <p:cNvSpPr/>
+          <p:nvPr/>
+        </p:nvSpPr>
+        <p:spPr>
+          <a:xfrm>
+            <a:off x="805815" y="589788"/>
+            <a:ext cx="86868" cy="86868"/>
+          </a:xfrm>
+          <a:prstGeom prst="ellipse">
+            <a:avLst/>
+          </a:prstGeom>
+          <a:solidFill>
+            <a:srgbClr val="F6A06B"/>
+          </a:solidFill>
+          <a:ln w="12700">
+            <a:solidFill>
+              <a:srgbClr val="333333"/>
+            </a:solidFill>
+            <a:prstDash val="solid"/>
+          </a:ln>
+        </p:spPr>
+      </p:sp>
+      <p:sp>
+        <p:nvSpPr>
+          <p:cNvPr id="5" name="Shape 3"/>
+          <p:cNvSpPr/>
+          <p:nvPr/>
+        </p:nvSpPr>
+        <p:spPr>
+          <a:xfrm>
+            <a:off x="653796" y="741807"/>
+            <a:ext cx="86868" cy="86868"/>
+          </a:xfrm>
+          <a:prstGeom prst="ellipse">
+            <a:avLst/>
+          </a:prstGeom>
+          <a:solidFill>
+            <a:srgbClr val="F6A06B"/>
+          </a:solidFill>
+          <a:ln w="12700">
+            <a:solidFill>
+              <a:srgbClr val="333333"/>
+            </a:solidFill>
+            <a:prstDash val="solid"/>
+          </a:ln>
+        </p:spPr>
+      </p:sp>
+      <p:sp>
+        <p:nvSpPr>
+          <p:cNvPr id="6" name="Shape 4"/>
+          <p:cNvSpPr/>
+          <p:nvPr/>
+        </p:nvSpPr>
+        <p:spPr>
+          <a:xfrm>
+            <a:off x="805815" y="741807"/>
+            <a:ext cx="86868" cy="86868"/>
+          </a:xfrm>
+          <a:prstGeom prst="ellipse">
+            <a:avLst/>
+          </a:prstGeom>
+          <a:solidFill>
+            <a:srgbClr val="F6A06B"/>
+          </a:solidFill>
+          <a:ln w="12700">
+            <a:solidFill>
+              <a:srgbClr val="333333"/>
+            </a:solidFill>
+            <a:prstDash val="solid"/>
+          </a:ln>
+        </p:spPr>
+      </p:sp>
+      <p:sp>
+        <p:nvSpPr>
+          <p:cNvPr id="7" name="Text 5"/>
+          <p:cNvSpPr txBox="1"/>
+          <p:nvPr/>
+        </p:nvSpPr>
+        <p:spPr>
+          <a:xfrm>
+            <a:off x="1225296" y="548640"/>
+            <a:ext cx="3657600" cy="365760"/>
+          </a:xfrm>
+          <a:prstGeom prst="rect">
+            <a:avLst/>
+          </a:prstGeom>
+          <a:noFill/>
+          <a:ln/>
+        </p:spPr>
+        <p:txBody>
+          <a:bodyPr wrap="square" lIns="0" tIns="0" rIns="0" bIns="0" rtlCol="0" anchor="ctr"/>
+          <a:lstStyle/>
+          <a:p>
+            <a:pPr indent="0" marL="0">
+              <a:buNone/>
+            </a:pPr>
+            <a:r>
+              <a:rPr lang="en-US" sz="1500" b="1" spc="300" kern="0" dirty="0">
+                <a:solidFill>
+                  <a:srgbClr val="FFE1D0"/>
+                </a:solidFill>
+                <a:latin typeface="Calibri" pitchFamily="34" charset="0"/>
+                <a:ea typeface="Calibri" pitchFamily="34" charset="-122"/>
+                <a:cs typeface="Calibri" pitchFamily="34" charset="-120"/>
+              </a:rPr>
+              <a:t>NUTRIBRICK</a:t>
+            </a:r>
+            <a:endParaRPr lang="en-US" sz="1500" dirty="0"/>
+          </a:p>
+        </p:txBody>
+      </p:sp>
+      <p:sp>
+        <p:nvSpPr>
+          <p:cNvPr id="8" name="Text 6"/>
+          <p:cNvSpPr txBox="1"/>
+          <p:nvPr/>
+        </p:nvSpPr>
+        <p:spPr>
+          <a:xfrm>
+            <a:off x="566928" y="1691640"/>
+            <a:ext cx="6949440" cy="2468880"/>
+          </a:xfrm>
+          <a:prstGeom prst="rect">
+            <a:avLst/>
+          </a:prstGeom>
+          <a:noFill/>
+          <a:ln/>
+        </p:spPr>
+        <p:txBody>
+          <a:bodyPr wrap="square" lIns="0" tIns="0" rIns="0" bIns="0" rtlCol="0" anchor="ctr"/>
+          <a:lstStyle/>
+          <a:p>
+            <a:pPr indent="0" marL="0">
+              <a:lnSpc>
+                <a:spcPts val="4400"/>
+              </a:lnSpc>
+              <a:buNone/>
+            </a:pPr>
+            <a:r>
+              <a:rPr lang="en-US" sz="3400" b="1" dirty="0">
+                <a:solidFill>
+                  <a:srgbClr val="F9F4ED"/>
+                </a:solidFill>
+                <a:latin typeface="Bookman Old Style" pitchFamily="34" charset="0"/>
+                <a:ea typeface="Bookman Old Style" pitchFamily="34" charset="-122"/>
+                <a:cs typeface="Bookman Old Style" pitchFamily="34" charset="-120"/>
+              </a:rPr>
+              <a:t>Kids decide with their</a:t>
+            </a:r>
+            <a:endParaRPr lang="en-US" sz="3400" dirty="0"/>
+          </a:p>
+          <a:p>
+            <a:pPr indent="0" marL="0">
+              <a:lnSpc>
+                <a:spcPts val="4400"/>
+              </a:lnSpc>
+              <a:buNone/>
+            </a:pPr>
+            <a:r>
+              <a:rPr lang="en-US" sz="3400" b="1" dirty="0">
+                <a:solidFill>
+                  <a:srgbClr val="F9F4ED"/>
+                </a:solidFill>
+                <a:latin typeface="Bookman Old Style" pitchFamily="34" charset="0"/>
+                <a:ea typeface="Bookman Old Style" pitchFamily="34" charset="-122"/>
+                <a:cs typeface="Bookman Old Style" pitchFamily="34" charset="-120"/>
+              </a:rPr>
+              <a:t>eyes and their hands</a:t>
+            </a:r>
+            <a:endParaRPr lang="en-US" sz="3400" dirty="0"/>
+          </a:p>
+          <a:p>
+            <a:pPr indent="0" marL="0">
+              <a:lnSpc>
+                <a:spcPts val="4400"/>
+              </a:lnSpc>
+              <a:buNone/>
+            </a:pPr>
+            <a:r>
+              <a:rPr lang="en-US" sz="3400" b="1" dirty="0">
+                <a:solidFill>
+                  <a:srgbClr val="F9F4ED"/>
+                </a:solidFill>
+                <a:latin typeface="Bookman Old Style" pitchFamily="34" charset="0"/>
+                <a:ea typeface="Bookman Old Style" pitchFamily="34" charset="-122"/>
+                <a:cs typeface="Bookman Old Style" pitchFamily="34" charset="-120"/>
+              </a:rPr>
+              <a:t>before anything else.</a:t>
+            </a:r>
+            <a:endParaRPr lang="en-US" sz="3400" dirty="0"/>
+          </a:p>
+        </p:txBody>
+      </p:sp>
+      <p:sp>
+        <p:nvSpPr>
+          <p:cNvPr id="9" name="Text 7"/>
+          <p:cNvSpPr txBox="1"/>
+          <p:nvPr/>
+        </p:nvSpPr>
+        <p:spPr>
+          <a:xfrm>
+            <a:off x="566928" y="4389120"/>
+            <a:ext cx="6583680" cy="731520"/>
+          </a:xfrm>
+          <a:prstGeom prst="rect">
+            <a:avLst/>
+          </a:prstGeom>
+          <a:noFill/>
+          <a:ln/>
+        </p:spPr>
+        <p:txBody>
+          <a:bodyPr wrap="square" lIns="0" tIns="0" rIns="0" bIns="0" rtlCol="0" anchor="ctr"/>
+          <a:lstStyle/>
+          <a:p>
+            <a:pPr indent="0" marL="0">
+              <a:lnSpc>
+                <a:spcPts val="2200"/>
+              </a:lnSpc>
+              <a:buNone/>
+            </a:pPr>
+            <a:r>
+              <a:rPr lang="en-US" sz="1600" dirty="0">
+                <a:solidFill>
+                  <a:srgbClr val="FFE1D0"/>
+                </a:solidFill>
+                <a:latin typeface="Calibri" pitchFamily="34" charset="0"/>
+                <a:ea typeface="Calibri" pitchFamily="34" charset="-122"/>
+                <a:cs typeface="Calibri" pitchFamily="34" charset="-120"/>
+              </a:rPr>
+              <a:t>Almost every healthy snack asks them to ignore that. Ours is built on it.</a:t>
+            </a:r>
+            <a:endParaRPr lang="en-US" sz="1600" dirty="0"/>
+          </a:p>
+        </p:txBody>
+      </p:sp>
+      <p:sp>
+        <p:nvSpPr>
+          <p:cNvPr id="10" name="Text 8"/>
+          <p:cNvSpPr txBox="1"/>
+          <p:nvPr/>
+        </p:nvSpPr>
+        <p:spPr>
+          <a:xfrm>
+            <a:off x="566928" y="5029200"/>
+            <a:ext cx="6583680" cy="457200"/>
+          </a:xfrm>
+          <a:prstGeom prst="rect">
+            <a:avLst/>
+          </a:prstGeom>
+          <a:noFill/>
+          <a:ln/>
+        </p:spPr>
+        <p:txBody>
+          <a:bodyPr wrap="square" lIns="0" tIns="0" rIns="0" bIns="0" rtlCol="0" anchor="ctr"/>
+          <a:lstStyle/>
+          <a:p>
+            <a:pPr indent="0" marL="0">
+              <a:buNone/>
+            </a:pPr>
+            <a:r>
+              <a:rPr lang="en-US" sz="1400" dirty="0">
+                <a:solidFill>
+                  <a:srgbClr val="C0B6A5"/>
+                </a:solidFill>
+                <a:latin typeface="Calibri" pitchFamily="34" charset="0"/>
+                <a:ea typeface="Calibri" pitchFamily="34" charset="-122"/>
+                <a:cs typeface="Calibri" pitchFamily="34" charset="-120"/>
+              </a:rPr>
+              <a:t>A Year 10 team working through Future Anything. Still a concept.</a:t>
+            </a:r>
+            <a:endParaRPr lang="en-US" sz="1400" dirty="0"/>
+          </a:p>
+        </p:txBody>
+      </p:sp>
+      <p:sp>
+        <p:nvSpPr>
+          <p:cNvPr id="11" name="Shape 9"/>
+          <p:cNvSpPr/>
+          <p:nvPr/>
+        </p:nvSpPr>
+        <p:spPr>
+          <a:xfrm>
+            <a:off x="566928" y="5349240"/>
+            <a:ext cx="4206240" cy="420624"/>
+          </a:xfrm>
+          <a:prstGeom prst="roundRect">
+            <a:avLst>
+              <a:gd name="adj" fmla="val 108696"/>
+            </a:avLst>
+          </a:prstGeom>
+          <a:solidFill>
+            <a:srgbClr val="728157"/>
+          </a:solidFill>
+          <a:ln w="25400">
+            <a:solidFill>
+              <a:srgbClr val="728157"/>
+            </a:solidFill>
+            <a:prstDash val="solid"/>
+          </a:ln>
+        </p:spPr>
+      </p:sp>
+      <p:sp>
+        <p:nvSpPr>
+          <p:cNvPr id="12" name="Text 10"/>
+          <p:cNvSpPr txBox="1"/>
+          <p:nvPr/>
+        </p:nvSpPr>
+        <p:spPr>
+          <a:xfrm>
+            <a:off x="566928" y="5349240"/>
+            <a:ext cx="4206240" cy="420624"/>
+          </a:xfrm>
+          <a:prstGeom prst="rect">
+            <a:avLst/>
+          </a:prstGeom>
+          <a:noFill/>
+          <a:ln/>
+        </p:spPr>
+        <p:txBody>
+          <a:bodyPr wrap="square" lIns="0" tIns="0" rIns="0" bIns="0" rtlCol="0" anchor="ctr"/>
+          <a:lstStyle/>
+          <a:p>
+            <a:pPr algn="ctr" indent="0" marL="0">
+              <a:buNone/>
+            </a:pPr>
+            <a:r>
+              <a:rPr lang="en-US" sz="1050" b="1" spc="140" kern="0" dirty="0">
+                <a:solidFill>
+                  <a:srgbClr val="F9F4ED"/>
+                </a:solidFill>
+                <a:latin typeface="Calibri" pitchFamily="34" charset="0"/>
+                <a:ea typeface="Calibri" pitchFamily="34" charset="-122"/>
+                <a:cs typeface="Calibri" pitchFamily="34" charset="-120"/>
+              </a:rPr>
+              <a:t>A FUTURE ANYTHING STUDENT VENTURE</a:t>
+            </a:r>
+            <a:endParaRPr lang="en-US" sz="1050" dirty="0"/>
+          </a:p>
+        </p:txBody>
+      </p:sp>
+      <p:pic>
+        <p:nvPicPr>
+          <p:cNvPr id="13" name="Image 0" descr="img-tower.png">    </p:cNvPr>
+          <p:cNvPicPr>
+            <a:picLocks noChangeAspect="1"/>
+          </p:cNvPicPr>
+          <p:nvPr/>
+        </p:nvPicPr>
+        <p:blipFill>
+          <a:blip r:embed="rId1"/>
+          <a:stretch>
+            <a:fillRect/>
+          </a:stretch>
+        </p:blipFill>
+        <p:spPr>
+          <a:xfrm>
+            <a:off x="8046720" y="1463040"/>
+            <a:ext cx="3566160" cy="2487168"/>
+          </a:xfrm>
+          <a:prstGeom prst="rect">
+            <a:avLst/>
+          </a:prstGeom>
+        </p:spPr>
+      </p:pic>
+    </p:spTree>
+  </p:cSld>
+  <p:clrMapOvr>
+    <a:masterClrMapping/>
+  </p:clrMapOvr>
+</p:sld>
+</file>
+
 <file path=ppt/slides/slide2.xml><?xml version="1.0" encoding="utf-8"?>
 <p:sld xmlns:a="http://schemas.openxmlformats.org/drawingml/2006/main" xmlns:r="http://schemas.openxmlformats.org/officeDocument/2006/relationships" xmlns:p="http://schemas.openxmlformats.org/presentationml/2006/main">
   <p:cSld name="Slide 2">
@@ -4305,7 +4845,7 @@
                 <a:ea typeface="Calibri" pitchFamily="34" charset="-122"/>
                 <a:cs typeface="Calibri" pitchFamily="34" charset="-120"/>
               </a:rPr>
-              <a:t>FROZEN KID MEALS</a:t>
+              <a:t>KIDFRESH</a:t>
             </a:r>
             <a:endParaRPr lang="en-US" sz="1100" dirty="0"/>
           </a:p>
@@ -4347,7 +4887,7 @@
                 <a:ea typeface="Calibri" pitchFamily="34" charset="-122"/>
                 <a:cs typeface="Calibri" pitchFamily="34" charset="-120"/>
               </a:rPr>
-              <a:t>Need a freezer, a microwave and twelve minutes you do not have.</a:t>
+              <a:t>Frozen premade meals in supermarkets. Long ingredient lists, and not sold in Australia.</a:t>
             </a:r>
             <a:endParaRPr lang="en-US" sz="1350" dirty="0"/>
           </a:p>
@@ -4477,7 +5017,7 @@
                 <a:ea typeface="Calibri" pitchFamily="34" charset="-122"/>
                 <a:cs typeface="Calibri" pitchFamily="34" charset="-120"/>
               </a:rPr>
-              <a:t>MEAL POUCHES</a:t>
+              <a:t>LITTLE SPOON</a:t>
             </a:r>
             <a:endParaRPr lang="en-US" sz="1100" dirty="0"/>
           </a:p>
@@ -4519,7 +5059,7 @@
                 <a:ea typeface="Calibri" pitchFamily="34" charset="-122"/>
                 <a:cs typeface="Calibri" pitchFamily="34" charset="-120"/>
               </a:rPr>
-              <a:t>Nutrition you cannot see, and nothing for a kid to actually do with it.</a:t>
+              <a:t>Fresh organic meals, but subscription only and priced for higher income parents.</a:t>
             </a:r>
             <a:endParaRPr lang="en-US" sz="1350" dirty="0"/>
           </a:p>
@@ -4649,7 +5189,7 @@
                 <a:ea typeface="Calibri" pitchFamily="34" charset="-122"/>
                 <a:cs typeface="Calibri" pitchFamily="34" charset="-120"/>
               </a:rPr>
-              <a:t>NOVELTY BLOCK LOLLIES</a:t>
+              <a:t>GUMMY BUILDING BLOCKS</a:t>
             </a:r>
             <a:endParaRPr lang="en-US" sz="1100" dirty="0"/>
           </a:p>
@@ -4691,7 +5231,7 @@
                 <a:ea typeface="Calibri" pitchFamily="34" charset="-122"/>
                 <a:cs typeface="Calibri" pitchFamily="34" charset="-120"/>
               </a:rPr>
-              <a:t>The fun shape is the whole product. Inside, it is sugar.</a:t>
+              <a:t>They stack, but they are sugar and sold as a party novelty.</a:t>
             </a:r>
             <a:endParaRPr lang="en-US" sz="1350" dirty="0"/>
           </a:p>
@@ -4870,7 +5410,7 @@
                 <a:ea typeface="Calibri" pitchFamily="34" charset="-122"/>
                 <a:cs typeface="Calibri" pitchFamily="34" charset="-120"/>
               </a:rPr>
-              <a:t>Play and nutrition in the same bite. Out of the fridge, into their hands.</a:t>
+              <a:t>Play and nutrition in the same bite. In store, and no subscription.</a:t>
             </a:r>
             <a:endParaRPr lang="en-US" sz="1350" dirty="0"/>
           </a:p>
@@ -7135,7 +7675,7 @@
     <p:bg>
       <p:bgPr>
         <a:solidFill>
-          <a:srgbClr val="402310"/>
+          <a:srgbClr val="F5EAD8"/>
         </a:solidFill>
       </p:bgPr>
     </p:bg>
@@ -7161,16 +7701,16 @@
         </p:nvSpPr>
         <p:spPr>
           <a:xfrm>
-            <a:off x="566928" y="502920"/>
-            <a:ext cx="457200" cy="457200"/>
+            <a:off x="566928" y="566928"/>
+            <a:ext cx="2743200" cy="384048"/>
           </a:xfrm>
           <a:prstGeom prst="roundRect">
             <a:avLst>
-              <a:gd name="adj" fmla="val 50000"/>
+              <a:gd name="adj" fmla="val 119048"/>
             </a:avLst>
           </a:prstGeom>
           <a:solidFill>
-            <a:srgbClr val="643312"/>
+            <a:srgbClr val="402310"/>
           </a:solidFill>
           <a:ln w="25400">
             <a:solidFill>
@@ -7182,20 +7722,171 @@
       </p:sp>
       <p:sp>
         <p:nvSpPr>
-          <p:cNvPr id="3" name="Shape 1"/>
+          <p:cNvPr id="3" name="Text 1"/>
+          <p:cNvSpPr txBox="1"/>
+          <p:nvPr/>
+        </p:nvSpPr>
+        <p:spPr>
+          <a:xfrm>
+            <a:off x="566928" y="566928"/>
+            <a:ext cx="2743200" cy="384048"/>
+          </a:xfrm>
+          <a:prstGeom prst="rect">
+            <a:avLst/>
+          </a:prstGeom>
+          <a:noFill/>
+          <a:ln/>
+        </p:spPr>
+        <p:txBody>
+          <a:bodyPr wrap="square" lIns="0" tIns="0" rIns="0" bIns="0" rtlCol="0" anchor="ctr"/>
+          <a:lstStyle/>
+          <a:p>
+            <a:pPr algn="ctr" indent="0" marL="0">
+              <a:buNone/>
+            </a:pPr>
+            <a:r>
+              <a:rPr lang="en-US" sz="1100" b="1" spc="140" kern="0" dirty="0">
+                <a:solidFill>
+                  <a:srgbClr val="F9F4ED"/>
+                </a:solidFill>
+                <a:latin typeface="Calibri" pitchFamily="34" charset="0"/>
+                <a:ea typeface="Calibri" pitchFamily="34" charset="-122"/>
+                <a:cs typeface="Calibri" pitchFamily="34" charset="-120"/>
+              </a:rPr>
+              <a:t>WHAT WE ARE ASKING FOR</a:t>
+            </a:r>
+            <a:endParaRPr lang="en-US" sz="1100" dirty="0"/>
+          </a:p>
+        </p:txBody>
+      </p:sp>
+      <p:sp>
+        <p:nvSpPr>
+          <p:cNvPr id="4" name="Text 2"/>
+          <p:cNvSpPr txBox="1"/>
+          <p:nvPr/>
+        </p:nvSpPr>
+        <p:spPr>
+          <a:xfrm>
+            <a:off x="566928" y="1051560"/>
+            <a:ext cx="8229600" cy="731520"/>
+          </a:xfrm>
+          <a:prstGeom prst="rect">
+            <a:avLst/>
+          </a:prstGeom>
+          <a:noFill/>
+          <a:ln/>
+        </p:spPr>
+        <p:txBody>
+          <a:bodyPr wrap="square" lIns="0" tIns="0" rIns="0" bIns="0" rtlCol="0" anchor="ctr"/>
+          <a:lstStyle/>
+          <a:p>
+            <a:pPr indent="0" marL="0">
+              <a:buNone/>
+            </a:pPr>
+            <a:r>
+              <a:rPr lang="en-US" sz="3300" b="1" dirty="0">
+                <a:solidFill>
+                  <a:srgbClr val="402310"/>
+                </a:solidFill>
+                <a:latin typeface="Bookman Old Style" pitchFamily="34" charset="0"/>
+                <a:ea typeface="Bookman Old Style" pitchFamily="34" charset="-122"/>
+                <a:cs typeface="Bookman Old Style" pitchFamily="34" charset="-120"/>
+              </a:rPr>
+              <a:t>$100,000 to get it off paper.</a:t>
+            </a:r>
+            <a:endParaRPr lang="en-US" sz="3300" dirty="0"/>
+          </a:p>
+        </p:txBody>
+      </p:sp>
+      <p:sp>
+        <p:nvSpPr>
+          <p:cNvPr id="5" name="Text 3"/>
+          <p:cNvSpPr txBox="1"/>
+          <p:nvPr/>
+        </p:nvSpPr>
+        <p:spPr>
+          <a:xfrm>
+            <a:off x="566928" y="1828800"/>
+            <a:ext cx="7680960" cy="548640"/>
+          </a:xfrm>
+          <a:prstGeom prst="rect">
+            <a:avLst/>
+          </a:prstGeom>
+          <a:noFill/>
+          <a:ln/>
+        </p:spPr>
+        <p:txBody>
+          <a:bodyPr wrap="square" lIns="0" tIns="0" rIns="0" bIns="0" rtlCol="0" anchor="ctr"/>
+          <a:lstStyle/>
+          <a:p>
+            <a:pPr indent="0" marL="0">
+              <a:buNone/>
+            </a:pPr>
+            <a:r>
+              <a:rPr lang="en-US" sz="1550" dirty="0">
+                <a:solidFill>
+                  <a:srgbClr val="2E2B25"/>
+                </a:solidFill>
+                <a:latin typeface="Calibri" pitchFamily="34" charset="0"/>
+                <a:ea typeface="Calibri" pitchFamily="34" charset="-122"/>
+                <a:cs typeface="Calibri" pitchFamily="34" charset="-120"/>
+              </a:rPr>
+              <a:t>NutriBrick is a concept and the nutrition figures are recipe targets. This is what changes that.</a:t>
+            </a:r>
+            <a:endParaRPr lang="en-US" sz="1550" dirty="0"/>
+          </a:p>
+        </p:txBody>
+      </p:sp>
+      <p:sp>
+        <p:nvSpPr>
+          <p:cNvPr id="6" name="Shape 4"/>
           <p:cNvSpPr/>
           <p:nvPr/>
         </p:nvSpPr>
         <p:spPr>
           <a:xfrm>
-            <a:off x="653796" y="589788"/>
-            <a:ext cx="86868" cy="86868"/>
+            <a:off x="566928" y="2606040"/>
+            <a:ext cx="3429000" cy="3017520"/>
+          </a:xfrm>
+          <a:prstGeom prst="roundRect">
+            <a:avLst>
+              <a:gd name="adj" fmla="val 5455"/>
+            </a:avLst>
+          </a:prstGeom>
+          <a:solidFill>
+            <a:srgbClr val="FFF2EB"/>
+          </a:solidFill>
+          <a:ln w="31750">
+            <a:solidFill>
+              <a:srgbClr val="402310"/>
+            </a:solidFill>
+            <a:prstDash val="solid"/>
+          </a:ln>
+          <a:effectLst>
+            <a:outerShdw sx="100000" sy="100000" kx="0" ky="0" algn="bl" rotWithShape="0" blurRad="101600" dist="63500" dir="2700000">
+              <a:srgbClr val="402310">
+                <a:alpha val="100000"/>
+              </a:srgbClr>
+            </a:outerShdw>
+          </a:effectLst>
+        </p:spPr>
+      </p:sp>
+      <p:sp>
+        <p:nvSpPr>
+          <p:cNvPr id="7" name="Shape 5"/>
+          <p:cNvSpPr/>
+          <p:nvPr/>
+        </p:nvSpPr>
+        <p:spPr>
+          <a:xfrm>
+            <a:off x="886968" y="2926080"/>
+            <a:ext cx="457200" cy="457200"/>
           </a:xfrm>
           <a:prstGeom prst="ellipse">
             <a:avLst/>
           </a:prstGeom>
           <a:solidFill>
-            <a:srgbClr val="F6A06B"/>
+            <a:srgbClr val="B2622D"/>
           </a:solidFill>
           <a:ln w="12700">
             <a:solidFill>
@@ -7207,20 +7898,197 @@
       </p:sp>
       <p:sp>
         <p:nvSpPr>
-          <p:cNvPr id="4" name="Shape 2"/>
+          <p:cNvPr id="8" name="Text 6"/>
+          <p:cNvSpPr txBox="1"/>
+          <p:nvPr/>
+        </p:nvSpPr>
+        <p:spPr>
+          <a:xfrm>
+            <a:off x="886968" y="2926080"/>
+            <a:ext cx="457200" cy="457200"/>
+          </a:xfrm>
+          <a:prstGeom prst="rect">
+            <a:avLst/>
+          </a:prstGeom>
+          <a:noFill/>
+          <a:ln/>
+        </p:spPr>
+        <p:txBody>
+          <a:bodyPr wrap="square" lIns="0" tIns="0" rIns="0" bIns="0" rtlCol="0" anchor="ctr"/>
+          <a:lstStyle/>
+          <a:p>
+            <a:pPr algn="ctr" indent="0" marL="0">
+              <a:buNone/>
+            </a:pPr>
+            <a:r>
+              <a:rPr lang="en-US" sz="1500" b="1" dirty="0">
+                <a:solidFill>
+                  <a:srgbClr val="F9F4ED"/>
+                </a:solidFill>
+                <a:latin typeface="Calibri" pitchFamily="34" charset="0"/>
+                <a:ea typeface="Calibri" pitchFamily="34" charset="-122"/>
+                <a:cs typeface="Calibri" pitchFamily="34" charset="-120"/>
+              </a:rPr>
+              <a:t>1</a:t>
+            </a:r>
+            <a:endParaRPr lang="en-US" sz="1500" dirty="0"/>
+          </a:p>
+        </p:txBody>
+      </p:sp>
+      <p:sp>
+        <p:nvSpPr>
+          <p:cNvPr id="9" name="Text 7"/>
+          <p:cNvSpPr txBox="1"/>
+          <p:nvPr/>
+        </p:nvSpPr>
+        <p:spPr>
+          <a:xfrm>
+            <a:off x="886968" y="3611880"/>
+            <a:ext cx="2834640" cy="822960"/>
+          </a:xfrm>
+          <a:prstGeom prst="rect">
+            <a:avLst/>
+          </a:prstGeom>
+          <a:noFill/>
+          <a:ln/>
+        </p:spPr>
+        <p:txBody>
+          <a:bodyPr wrap="square" lIns="0" tIns="0" rIns="0" bIns="0" rtlCol="0" anchor="ctr"/>
+          <a:lstStyle/>
+          <a:p>
+            <a:pPr indent="0" marL="0">
+              <a:lnSpc>
+                <a:spcPts val="2400"/>
+              </a:lnSpc>
+              <a:buNone/>
+            </a:pPr>
+            <a:r>
+              <a:rPr lang="en-US" sz="1900" b="1" dirty="0">
+                <a:solidFill>
+                  <a:srgbClr val="402310"/>
+                </a:solidFill>
+                <a:latin typeface="Bookman Old Style" pitchFamily="34" charset="0"/>
+                <a:ea typeface="Bookman Old Style" pitchFamily="34" charset="-122"/>
+                <a:cs typeface="Bookman Old Style" pitchFamily="34" charset="-120"/>
+              </a:rPr>
+              <a:t>Food scientist</a:t>
+            </a:r>
+            <a:endParaRPr lang="en-US" sz="1900" dirty="0"/>
+          </a:p>
+          <a:p>
+            <a:pPr indent="0" marL="0">
+              <a:lnSpc>
+                <a:spcPts val="2400"/>
+              </a:lnSpc>
+              <a:buNone/>
+            </a:pPr>
+            <a:r>
+              <a:rPr lang="en-US" sz="1900" b="1" dirty="0">
+                <a:solidFill>
+                  <a:srgbClr val="402310"/>
+                </a:solidFill>
+                <a:latin typeface="Bookman Old Style" pitchFamily="34" charset="0"/>
+                <a:ea typeface="Bookman Old Style" pitchFamily="34" charset="-122"/>
+                <a:cs typeface="Bookman Old Style" pitchFamily="34" charset="-120"/>
+              </a:rPr>
+              <a:t>&amp; nutritionist</a:t>
+            </a:r>
+            <a:endParaRPr lang="en-US" sz="1900" dirty="0"/>
+          </a:p>
+        </p:txBody>
+      </p:sp>
+      <p:sp>
+        <p:nvSpPr>
+          <p:cNvPr id="10" name="Text 8"/>
+          <p:cNvSpPr txBox="1"/>
+          <p:nvPr/>
+        </p:nvSpPr>
+        <p:spPr>
+          <a:xfrm>
+            <a:off x="886968" y="4526280"/>
+            <a:ext cx="2834640" cy="1005840"/>
+          </a:xfrm>
+          <a:prstGeom prst="rect">
+            <a:avLst/>
+          </a:prstGeom>
+          <a:noFill/>
+          <a:ln/>
+        </p:spPr>
+        <p:txBody>
+          <a:bodyPr wrap="square" lIns="0" tIns="0" rIns="0" bIns="0" rtlCol="0" anchor="ctr"/>
+          <a:lstStyle/>
+          <a:p>
+            <a:pPr indent="0" marL="0">
+              <a:lnSpc>
+                <a:spcPts val="1900"/>
+              </a:lnSpc>
+              <a:buNone/>
+            </a:pPr>
+            <a:r>
+              <a:rPr lang="en-US" sz="1300" dirty="0">
+                <a:solidFill>
+                  <a:srgbClr val="2E2B25"/>
+                </a:solidFill>
+                <a:latin typeface="Calibri" pitchFamily="34" charset="0"/>
+                <a:ea typeface="Calibri" pitchFamily="34" charset="-122"/>
+                <a:cs typeface="Calibri" pitchFamily="34" charset="-120"/>
+              </a:rPr>
+              <a:t>Turn the recipe into a real formulation, and verify the macros, shelf life and allergen safety.</a:t>
+            </a:r>
+            <a:endParaRPr lang="en-US" sz="1300" dirty="0"/>
+          </a:p>
+        </p:txBody>
+      </p:sp>
+      <p:sp>
+        <p:nvSpPr>
+          <p:cNvPr id="11" name="Shape 9"/>
           <p:cNvSpPr/>
           <p:nvPr/>
         </p:nvSpPr>
         <p:spPr>
           <a:xfrm>
-            <a:off x="805815" y="589788"/>
-            <a:ext cx="86868" cy="86868"/>
+            <a:off x="4279392" y="2606040"/>
+            <a:ext cx="3429000" cy="3017520"/>
+          </a:xfrm>
+          <a:prstGeom prst="roundRect">
+            <a:avLst>
+              <a:gd name="adj" fmla="val 5455"/>
+            </a:avLst>
+          </a:prstGeom>
+          <a:solidFill>
+            <a:srgbClr val="FFF2EB"/>
+          </a:solidFill>
+          <a:ln w="31750">
+            <a:solidFill>
+              <a:srgbClr val="402310"/>
+            </a:solidFill>
+            <a:prstDash val="solid"/>
+          </a:ln>
+          <a:effectLst>
+            <a:outerShdw sx="100000" sy="100000" kx="0" ky="0" algn="bl" rotWithShape="0" blurRad="101600" dist="63500" dir="2700000">
+              <a:srgbClr val="402310">
+                <a:alpha val="100000"/>
+              </a:srgbClr>
+            </a:outerShdw>
+          </a:effectLst>
+        </p:spPr>
+      </p:sp>
+      <p:sp>
+        <p:nvSpPr>
+          <p:cNvPr id="12" name="Shape 10"/>
+          <p:cNvSpPr/>
+          <p:nvPr/>
+        </p:nvSpPr>
+        <p:spPr>
+          <a:xfrm>
+            <a:off x="4599432" y="2926080"/>
+            <a:ext cx="457200" cy="457200"/>
           </a:xfrm>
           <a:prstGeom prst="ellipse">
             <a:avLst/>
           </a:prstGeom>
           <a:solidFill>
-            <a:srgbClr val="F6A06B"/>
+            <a:srgbClr val="B2622D"/>
           </a:solidFill>
           <a:ln w="12700">
             <a:solidFill>
@@ -7232,20 +8100,197 @@
       </p:sp>
       <p:sp>
         <p:nvSpPr>
-          <p:cNvPr id="5" name="Shape 3"/>
+          <p:cNvPr id="13" name="Text 11"/>
+          <p:cNvSpPr txBox="1"/>
+          <p:nvPr/>
+        </p:nvSpPr>
+        <p:spPr>
+          <a:xfrm>
+            <a:off x="4599432" y="2926080"/>
+            <a:ext cx="457200" cy="457200"/>
+          </a:xfrm>
+          <a:prstGeom prst="rect">
+            <a:avLst/>
+          </a:prstGeom>
+          <a:noFill/>
+          <a:ln/>
+        </p:spPr>
+        <p:txBody>
+          <a:bodyPr wrap="square" lIns="0" tIns="0" rIns="0" bIns="0" rtlCol="0" anchor="ctr"/>
+          <a:lstStyle/>
+          <a:p>
+            <a:pPr algn="ctr" indent="0" marL="0">
+              <a:buNone/>
+            </a:pPr>
+            <a:r>
+              <a:rPr lang="en-US" sz="1500" b="1" dirty="0">
+                <a:solidFill>
+                  <a:srgbClr val="F9F4ED"/>
+                </a:solidFill>
+                <a:latin typeface="Calibri" pitchFamily="34" charset="0"/>
+                <a:ea typeface="Calibri" pitchFamily="34" charset="-122"/>
+                <a:cs typeface="Calibri" pitchFamily="34" charset="-120"/>
+              </a:rPr>
+              <a:t>2</a:t>
+            </a:r>
+            <a:endParaRPr lang="en-US" sz="1500" dirty="0"/>
+          </a:p>
+        </p:txBody>
+      </p:sp>
+      <p:sp>
+        <p:nvSpPr>
+          <p:cNvPr id="14" name="Text 12"/>
+          <p:cNvSpPr txBox="1"/>
+          <p:nvPr/>
+        </p:nvSpPr>
+        <p:spPr>
+          <a:xfrm>
+            <a:off x="4599432" y="3611880"/>
+            <a:ext cx="2834640" cy="822960"/>
+          </a:xfrm>
+          <a:prstGeom prst="rect">
+            <a:avLst/>
+          </a:prstGeom>
+          <a:noFill/>
+          <a:ln/>
+        </p:spPr>
+        <p:txBody>
+          <a:bodyPr wrap="square" lIns="0" tIns="0" rIns="0" bIns="0" rtlCol="0" anchor="ctr"/>
+          <a:lstStyle/>
+          <a:p>
+            <a:pPr indent="0" marL="0">
+              <a:lnSpc>
+                <a:spcPts val="2400"/>
+              </a:lnSpc>
+              <a:buNone/>
+            </a:pPr>
+            <a:r>
+              <a:rPr lang="en-US" sz="1900" b="1" dirty="0">
+                <a:solidFill>
+                  <a:srgbClr val="402310"/>
+                </a:solidFill>
+                <a:latin typeface="Bookman Old Style" pitchFamily="34" charset="0"/>
+                <a:ea typeface="Bookman Old Style" pitchFamily="34" charset="-122"/>
+                <a:cs typeface="Bookman Old Style" pitchFamily="34" charset="-120"/>
+              </a:rPr>
+              <a:t>Food grade</a:t>
+            </a:r>
+            <a:endParaRPr lang="en-US" sz="1900" dirty="0"/>
+          </a:p>
+          <a:p>
+            <a:pPr indent="0" marL="0">
+              <a:lnSpc>
+                <a:spcPts val="2400"/>
+              </a:lnSpc>
+              <a:buNone/>
+            </a:pPr>
+            <a:r>
+              <a:rPr lang="en-US" sz="1900" b="1" dirty="0">
+                <a:solidFill>
+                  <a:srgbClr val="402310"/>
+                </a:solidFill>
+                <a:latin typeface="Bookman Old Style" pitchFamily="34" charset="0"/>
+                <a:ea typeface="Bookman Old Style" pitchFamily="34" charset="-122"/>
+                <a:cs typeface="Bookman Old Style" pitchFamily="34" charset="-120"/>
+              </a:rPr>
+              <a:t>moulds</a:t>
+            </a:r>
+            <a:endParaRPr lang="en-US" sz="1900" dirty="0"/>
+          </a:p>
+        </p:txBody>
+      </p:sp>
+      <p:sp>
+        <p:nvSpPr>
+          <p:cNvPr id="15" name="Text 13"/>
+          <p:cNvSpPr txBox="1"/>
+          <p:nvPr/>
+        </p:nvSpPr>
+        <p:spPr>
+          <a:xfrm>
+            <a:off x="4599432" y="4526280"/>
+            <a:ext cx="2834640" cy="1005840"/>
+          </a:xfrm>
+          <a:prstGeom prst="rect">
+            <a:avLst/>
+          </a:prstGeom>
+          <a:noFill/>
+          <a:ln/>
+        </p:spPr>
+        <p:txBody>
+          <a:bodyPr wrap="square" lIns="0" tIns="0" rIns="0" bIns="0" rtlCol="0" anchor="ctr"/>
+          <a:lstStyle/>
+          <a:p>
+            <a:pPr indent="0" marL="0">
+              <a:lnSpc>
+                <a:spcPts val="1900"/>
+              </a:lnSpc>
+              <a:buNone/>
+            </a:pPr>
+            <a:r>
+              <a:rPr lang="en-US" sz="1300" dirty="0">
+                <a:solidFill>
+                  <a:srgbClr val="2E2B25"/>
+                </a:solidFill>
+                <a:latin typeface="Calibri" pitchFamily="34" charset="0"/>
+                <a:ea typeface="Calibri" pitchFamily="34" charset="-122"/>
+                <a:cs typeface="Calibri" pitchFamily="34" charset="-120"/>
+              </a:rPr>
+              <a:t>The studs have to interlock and survive a six year old. Tooling is the main upfront cost.</a:t>
+            </a:r>
+            <a:endParaRPr lang="en-US" sz="1300" dirty="0"/>
+          </a:p>
+        </p:txBody>
+      </p:sp>
+      <p:sp>
+        <p:nvSpPr>
+          <p:cNvPr id="16" name="Shape 14"/>
           <p:cNvSpPr/>
           <p:nvPr/>
         </p:nvSpPr>
         <p:spPr>
           <a:xfrm>
-            <a:off x="653796" y="741807"/>
-            <a:ext cx="86868" cy="86868"/>
+            <a:off x="7991856" y="2606040"/>
+            <a:ext cx="3429000" cy="3017520"/>
+          </a:xfrm>
+          <a:prstGeom prst="roundRect">
+            <a:avLst>
+              <a:gd name="adj" fmla="val 5455"/>
+            </a:avLst>
+          </a:prstGeom>
+          <a:solidFill>
+            <a:srgbClr val="F0FAE1"/>
+          </a:solidFill>
+          <a:ln w="31750">
+            <a:solidFill>
+              <a:srgbClr val="402310"/>
+            </a:solidFill>
+            <a:prstDash val="solid"/>
+          </a:ln>
+          <a:effectLst>
+            <a:outerShdw sx="100000" sy="100000" kx="0" ky="0" algn="bl" rotWithShape="0" blurRad="101600" dist="63500" dir="2700000">
+              <a:srgbClr val="402310">
+                <a:alpha val="100000"/>
+              </a:srgbClr>
+            </a:outerShdw>
+          </a:effectLst>
+        </p:spPr>
+      </p:sp>
+      <p:sp>
+        <p:nvSpPr>
+          <p:cNvPr id="17" name="Shape 15"/>
+          <p:cNvSpPr/>
+          <p:nvPr/>
+        </p:nvSpPr>
+        <p:spPr>
+          <a:xfrm>
+            <a:off x="8311896" y="2926080"/>
+            <a:ext cx="457200" cy="457200"/>
           </a:xfrm>
           <a:prstGeom prst="ellipse">
             <a:avLst/>
           </a:prstGeom>
           <a:solidFill>
-            <a:srgbClr val="F6A06B"/>
+            <a:srgbClr val="728157"/>
           </a:solidFill>
           <a:ln w="12700">
             <a:solidFill>
@@ -7257,63 +8302,38 @@
       </p:sp>
       <p:sp>
         <p:nvSpPr>
-          <p:cNvPr id="6" name="Shape 4"/>
-          <p:cNvSpPr/>
-          <p:nvPr/>
-        </p:nvSpPr>
-        <p:spPr>
-          <a:xfrm>
-            <a:off x="805815" y="741807"/>
-            <a:ext cx="86868" cy="86868"/>
-          </a:xfrm>
-          <a:prstGeom prst="ellipse">
-            <a:avLst/>
-          </a:prstGeom>
-          <a:solidFill>
-            <a:srgbClr val="F6A06B"/>
-          </a:solidFill>
-          <a:ln w="12700">
-            <a:solidFill>
-              <a:srgbClr val="333333"/>
-            </a:solidFill>
-            <a:prstDash val="solid"/>
-          </a:ln>
-        </p:spPr>
-      </p:sp>
-      <p:sp>
-        <p:nvSpPr>
-          <p:cNvPr id="7" name="Text 5"/>
-          <p:cNvSpPr txBox="1"/>
-          <p:nvPr/>
-        </p:nvSpPr>
-        <p:spPr>
-          <a:xfrm>
-            <a:off x="1225296" y="548640"/>
-            <a:ext cx="3657600" cy="365760"/>
-          </a:xfrm>
-          <a:prstGeom prst="rect">
-            <a:avLst/>
-          </a:prstGeom>
-          <a:noFill/>
-          <a:ln/>
-        </p:spPr>
-        <p:txBody>
-          <a:bodyPr wrap="square" lIns="0" tIns="0" rIns="0" bIns="0" rtlCol="0" anchor="ctr"/>
-          <a:lstStyle/>
-          <a:p>
-            <a:pPr indent="0" marL="0">
-              <a:buNone/>
-            </a:pPr>
-            <a:r>
-              <a:rPr lang="en-US" sz="1500" b="1" spc="300" kern="0" dirty="0">
-                <a:solidFill>
-                  <a:srgbClr val="FFE1D0"/>
+          <p:cNvPr id="18" name="Text 16"/>
+          <p:cNvSpPr txBox="1"/>
+          <p:nvPr/>
+        </p:nvSpPr>
+        <p:spPr>
+          <a:xfrm>
+            <a:off x="8311896" y="2926080"/>
+            <a:ext cx="457200" cy="457200"/>
+          </a:xfrm>
+          <a:prstGeom prst="rect">
+            <a:avLst/>
+          </a:prstGeom>
+          <a:noFill/>
+          <a:ln/>
+        </p:spPr>
+        <p:txBody>
+          <a:bodyPr wrap="square" lIns="0" tIns="0" rIns="0" bIns="0" rtlCol="0" anchor="ctr"/>
+          <a:lstStyle/>
+          <a:p>
+            <a:pPr algn="ctr" indent="0" marL="0">
+              <a:buNone/>
+            </a:pPr>
+            <a:r>
+              <a:rPr lang="en-US" sz="1500" b="1" dirty="0">
+                <a:solidFill>
+                  <a:srgbClr val="F9F4ED"/>
                 </a:solidFill>
                 <a:latin typeface="Calibri" pitchFamily="34" charset="0"/>
                 <a:ea typeface="Calibri" pitchFamily="34" charset="-122"/>
                 <a:cs typeface="Calibri" pitchFamily="34" charset="-120"/>
               </a:rPr>
-              <a:t>NUTRIBRICK</a:t>
+              <a:t>3</a:t>
             </a:r>
             <a:endParaRPr lang="en-US" sz="1500" dirty="0"/>
           </a:p>
@@ -7321,14 +8341,14 @@
       </p:sp>
       <p:sp>
         <p:nvSpPr>
-          <p:cNvPr id="8" name="Text 6"/>
-          <p:cNvSpPr txBox="1"/>
-          <p:nvPr/>
-        </p:nvSpPr>
-        <p:spPr>
-          <a:xfrm>
-            <a:off x="566928" y="1691640"/>
-            <a:ext cx="6949440" cy="2468880"/>
+          <p:cNvPr id="19" name="Text 17"/>
+          <p:cNvSpPr txBox="1"/>
+          <p:nvPr/>
+        </p:nvSpPr>
+        <p:spPr>
+          <a:xfrm>
+            <a:off x="8311896" y="3611880"/>
+            <a:ext cx="2834640" cy="822960"/>
           </a:xfrm>
           <a:prstGeom prst="rect">
             <a:avLst/>
@@ -7342,197 +8362,87 @@
           <a:p>
             <a:pPr indent="0" marL="0">
               <a:lnSpc>
-                <a:spcPts val="4400"/>
+                <a:spcPts val="2400"/>
               </a:lnSpc>
               <a:buNone/>
             </a:pPr>
             <a:r>
-              <a:rPr lang="en-US" sz="3400" b="1" dirty="0">
-                <a:solidFill>
-                  <a:srgbClr val="F9F4ED"/>
+              <a:rPr lang="en-US" sz="1900" b="1" dirty="0">
+                <a:solidFill>
+                  <a:srgbClr val="402310"/>
                 </a:solidFill>
                 <a:latin typeface="Bookman Old Style" pitchFamily="34" charset="0"/>
                 <a:ea typeface="Bookman Old Style" pitchFamily="34" charset="-122"/>
                 <a:cs typeface="Bookman Old Style" pitchFamily="34" charset="-120"/>
               </a:rPr>
-              <a:t>Make the healthy thing</a:t>
-            </a:r>
-            <a:endParaRPr lang="en-US" sz="3400" dirty="0"/>
+              <a:t>A small</a:t>
+            </a:r>
+            <a:endParaRPr lang="en-US" sz="1900" dirty="0"/>
           </a:p>
           <a:p>
             <a:pPr indent="0" marL="0">
               <a:lnSpc>
-                <a:spcPts val="4400"/>
+                <a:spcPts val="2400"/>
               </a:lnSpc>
               <a:buNone/>
             </a:pPr>
             <a:r>
-              <a:rPr lang="en-US" sz="3400" b="1" dirty="0">
-                <a:solidFill>
-                  <a:srgbClr val="F9F4ED"/>
+              <a:rPr lang="en-US" sz="1900" b="1" dirty="0">
+                <a:solidFill>
+                  <a:srgbClr val="402310"/>
                 </a:solidFill>
                 <a:latin typeface="Bookman Old Style" pitchFamily="34" charset="0"/>
                 <a:ea typeface="Bookman Old Style" pitchFamily="34" charset="-122"/>
                 <a:cs typeface="Bookman Old Style" pitchFamily="34" charset="-120"/>
               </a:rPr>
-              <a:t>the fun thing, and you</a:t>
-            </a:r>
-            <a:endParaRPr lang="en-US" sz="3400" dirty="0"/>
-          </a:p>
+              <a:t>production run</a:t>
+            </a:r>
+            <a:endParaRPr lang="en-US" sz="1900" dirty="0"/>
+          </a:p>
+        </p:txBody>
+      </p:sp>
+      <p:sp>
+        <p:nvSpPr>
+          <p:cNvPr id="20" name="Text 18"/>
+          <p:cNvSpPr txBox="1"/>
+          <p:nvPr/>
+        </p:nvSpPr>
+        <p:spPr>
+          <a:xfrm>
+            <a:off x="8311896" y="4526280"/>
+            <a:ext cx="2834640" cy="1005840"/>
+          </a:xfrm>
+          <a:prstGeom prst="rect">
+            <a:avLst/>
+          </a:prstGeom>
+          <a:noFill/>
+          <a:ln/>
+        </p:spPr>
+        <p:txBody>
+          <a:bodyPr wrap="square" lIns="0" tIns="0" rIns="0" bIns="0" rtlCol="0" anchor="ctr"/>
+          <a:lstStyle/>
           <a:p>
             <a:pPr indent="0" marL="0">
               <a:lnSpc>
-                <a:spcPts val="4400"/>
+                <a:spcPts val="1900"/>
               </a:lnSpc>
               <a:buNone/>
             </a:pPr>
             <a:r>
-              <a:rPr lang="en-US" sz="3400" b="1" dirty="0">
-                <a:solidFill>
-                  <a:srgbClr val="F9F4ED"/>
-                </a:solidFill>
-                <a:latin typeface="Bookman Old Style" pitchFamily="34" charset="0"/>
-                <a:ea typeface="Bookman Old Style" pitchFamily="34" charset="-122"/>
-                <a:cs typeface="Bookman Old Style" pitchFamily="34" charset="-120"/>
-              </a:rPr>
-              <a:t>don’t have to negotiate.</a:t>
-            </a:r>
-            <a:endParaRPr lang="en-US" sz="3400" dirty="0"/>
-          </a:p>
-        </p:txBody>
-      </p:sp>
-      <p:sp>
-        <p:nvSpPr>
-          <p:cNvPr id="9" name="Text 7"/>
-          <p:cNvSpPr txBox="1"/>
-          <p:nvPr/>
-        </p:nvSpPr>
-        <p:spPr>
-          <a:xfrm>
-            <a:off x="566928" y="4434840"/>
-            <a:ext cx="6583680" cy="731520"/>
-          </a:xfrm>
-          <a:prstGeom prst="rect">
-            <a:avLst/>
-          </a:prstGeom>
-          <a:noFill/>
-          <a:ln/>
-        </p:spPr>
-        <p:txBody>
-          <a:bodyPr wrap="square" lIns="0" tIns="0" rIns="0" bIns="0" rtlCol="0" anchor="ctr"/>
-          <a:lstStyle/>
-          <a:p>
-            <a:pPr indent="0" marL="0">
-              <a:lnSpc>
-                <a:spcPts val="2200"/>
-              </a:lnSpc>
-              <a:buNone/>
-            </a:pPr>
-            <a:r>
-              <a:rPr lang="en-US" sz="1500" dirty="0">
-                <a:solidFill>
-                  <a:srgbClr val="FFE1D0"/>
+              <a:rPr lang="en-US" sz="1300" dirty="0">
+                <a:solidFill>
+                  <a:srgbClr val="2E2B25"/>
                 </a:solidFill>
                 <a:latin typeface="Calibri" pitchFamily="34" charset="0"/>
                 <a:ea typeface="Calibri" pitchFamily="34" charset="-122"/>
                 <a:cs typeface="Calibri" pitchFamily="34" charset="-120"/>
               </a:rPr>
-              <a:t>A Year 10 idea, built properly. NutriBrick is still a concept — this is the pitch for it.</a:t>
-            </a:r>
-            <a:endParaRPr lang="en-US" sz="1500" dirty="0"/>
-          </a:p>
-        </p:txBody>
-      </p:sp>
-      <p:sp>
-        <p:nvSpPr>
-          <p:cNvPr id="10" name="Shape 8"/>
-          <p:cNvSpPr/>
-          <p:nvPr/>
-        </p:nvSpPr>
-        <p:spPr>
-          <a:xfrm>
-            <a:off x="566928" y="5349240"/>
-            <a:ext cx="4206240" cy="420624"/>
-          </a:xfrm>
-          <a:prstGeom prst="roundRect">
-            <a:avLst>
-              <a:gd name="adj" fmla="val 108696"/>
-            </a:avLst>
-          </a:prstGeom>
-          <a:solidFill>
-            <a:srgbClr val="728157"/>
-          </a:solidFill>
-          <a:ln w="25400">
-            <a:solidFill>
-              <a:srgbClr val="728157"/>
-            </a:solidFill>
-            <a:prstDash val="solid"/>
-          </a:ln>
-        </p:spPr>
-      </p:sp>
-      <p:sp>
-        <p:nvSpPr>
-          <p:cNvPr id="11" name="Text 9"/>
-          <p:cNvSpPr txBox="1"/>
-          <p:nvPr/>
-        </p:nvSpPr>
-        <p:spPr>
-          <a:xfrm>
-            <a:off x="566928" y="5349240"/>
-            <a:ext cx="4206240" cy="420624"/>
-          </a:xfrm>
-          <a:prstGeom prst="rect">
-            <a:avLst/>
-          </a:prstGeom>
-          <a:noFill/>
-          <a:ln/>
-        </p:spPr>
-        <p:txBody>
-          <a:bodyPr wrap="square" lIns="0" tIns="0" rIns="0" bIns="0" rtlCol="0" anchor="ctr"/>
-          <a:lstStyle/>
-          <a:p>
-            <a:pPr algn="ctr" indent="0" marL="0">
-              <a:buNone/>
-            </a:pPr>
-            <a:r>
-              <a:rPr lang="en-US" sz="1050" b="1" spc="140" kern="0" dirty="0">
-                <a:solidFill>
-                  <a:srgbClr val="F9F4ED"/>
-                </a:solidFill>
-                <a:latin typeface="Calibri" pitchFamily="34" charset="0"/>
-                <a:ea typeface="Calibri" pitchFamily="34" charset="-122"/>
-                <a:cs typeface="Calibri" pitchFamily="34" charset="-120"/>
-              </a:rPr>
-              <a:t>A FUTURE ANYTHING STUDENT VENTURE</a:t>
-            </a:r>
-            <a:endParaRPr lang="en-US" sz="1050" dirty="0"/>
-          </a:p>
-        </p:txBody>
-      </p:sp>
-      <p:pic>
-        <p:nvPicPr>
-          <p:cNvPr id="12" name="Image 0" descr="img-tower.png">    </p:cNvPr>
-          <p:cNvPicPr>
-            <a:picLocks noChangeAspect="1"/>
-          </p:cNvPicPr>
-          <p:nvPr/>
-        </p:nvPicPr>
-        <p:blipFill>
-          <a:blip r:embed="rId1"/>
-          <a:stretch>
-            <a:fillRect/>
-          </a:stretch>
-        </p:blipFill>
-        <p:spPr>
-          <a:xfrm>
-            <a:off x="8046720" y="1463040"/>
-            <a:ext cx="3566160" cy="2487168"/>
-          </a:xfrm>
-          <a:prstGeom prst="rect">
-            <a:avLst/>
-          </a:prstGeom>
-        </p:spPr>
-      </p:pic>
+              <a:t>Put real bricks in front of real families and test whether kids build before they eat.</a:t>
+            </a:r>
+            <a:endParaRPr lang="en-US" sz="1300" dirty="0"/>
+          </a:p>
+        </p:txBody>
+      </p:sp>
     </p:spTree>
   </p:cSld>
   <p:clrMapOvr>
